--- a/abbildungen/kap3/Modell_der_Teilplanungsgebiete.pptx
+++ b/abbildungen/kap3/Modell_der_Teilplanungsgebiete.pptx
@@ -3987,36 +3987,7 @@
       </p:sp>
       <p:sp>
         <p:nvSpPr>
-          <p:cNvPr id="19" name="Knoten"/>
-          <p:cNvSpPr/>
-          <p:nvPr/>
-        </p:nvSpPr>
-        <p:spPr>
-          <a:xfrm>
-            <a:off x="1981800" y="300600"/>
-            <a:ext cx="32400" cy="32400"/>
-          </a:xfrm>
-          <a:prstGeom prst="ellipse">
-            <a:avLst/>
-          </a:prstGeom>
-          <a:solidFill>
-            <a:srgbClr val="3A3F44"/>
-          </a:solidFill>
-          <a:ln>
-            <a:noFill/>
-          </a:ln>
-        </p:spPr>
-        <p:txBody>
-          <a:bodyPr rtlCol="0" anchor="ctr"/>
-          <a:lstStyle/>
-          <a:p>
-            <a:pPr algn="ctr"/>
-          </a:p>
-        </p:txBody>
-      </p:sp>
-      <p:sp>
-        <p:nvSpPr>
-          <p:cNvPr id="20" name="Absatz–Produktion"/>
+          <p:cNvPr id="19" name="Absatz–Produktion"/>
           <p:cNvSpPr/>
           <p:nvPr/>
         </p:nvSpPr>
@@ -4061,7 +4032,7 @@
       </p:sp>
       <p:sp>
         <p:nvSpPr>
-          <p:cNvPr id="21" name="Absatz–Umsatz"/>
+          <p:cNvPr id="20" name="Absatz–Umsatz"/>
           <p:cNvSpPr/>
           <p:nvPr/>
         </p:nvSpPr>
@@ -4106,7 +4077,7 @@
       </p:sp>
       <p:sp>
         <p:nvSpPr>
-          <p:cNvPr id="22" name="Produktion Abgang"/>
+          <p:cNvPr id="21" name="Produktion Abgang"/>
           <p:cNvSpPr/>
           <p:nvPr/>
         </p:nvSpPr>
@@ -4150,7 +4121,7 @@
       </p:sp>
       <p:sp>
         <p:nvSpPr>
-          <p:cNvPr id="23" name="Produktion–43"/>
+          <p:cNvPr id="22" name="Produktion–43"/>
           <p:cNvSpPr/>
           <p:nvPr/>
         </p:nvSpPr>
@@ -4198,7 +4169,7 @@
       </p:sp>
       <p:sp>
         <p:nvSpPr>
-          <p:cNvPr id="24" name="Produktion–68"/>
+          <p:cNvPr id="23" name="Produktion–68"/>
           <p:cNvSpPr/>
           <p:nvPr/>
         </p:nvSpPr>
@@ -4246,7 +4217,7 @@
       </p:sp>
       <p:sp>
         <p:nvSpPr>
-          <p:cNvPr id="25" name="Produktion–93"/>
+          <p:cNvPr id="24" name="Produktion–93"/>
           <p:cNvSpPr/>
           <p:nvPr/>
         </p:nvSpPr>
@@ -4294,36 +4265,7 @@
       </p:sp>
       <p:sp>
         <p:nvSpPr>
-          <p:cNvPr id="26" name="Knoten"/>
-          <p:cNvSpPr/>
-          <p:nvPr/>
-        </p:nvSpPr>
-        <p:spPr>
-          <a:xfrm>
-            <a:off x="1981800" y="739800"/>
-            <a:ext cx="32400" cy="32400"/>
-          </a:xfrm>
-          <a:prstGeom prst="ellipse">
-            <a:avLst/>
-          </a:prstGeom>
-          <a:solidFill>
-            <a:srgbClr val="3A3F44"/>
-          </a:solidFill>
-          <a:ln>
-            <a:noFill/>
-          </a:ln>
-        </p:spPr>
-        <p:txBody>
-          <a:bodyPr rtlCol="0" anchor="ctr"/>
-          <a:lstStyle/>
-          <a:p>
-            <a:pPr algn="ctr"/>
-          </a:p>
-        </p:txBody>
-      </p:sp>
-      <p:sp>
-        <p:nvSpPr>
-          <p:cNvPr id="27" name="Einkauf–Herstellkosten"/>
+          <p:cNvPr id="25" name="Einkauf–Herstellkosten"/>
           <p:cNvSpPr/>
           <p:nvPr/>
         </p:nvSpPr>
@@ -4368,7 +4310,7 @@
       </p:sp>
       <p:sp>
         <p:nvSpPr>
-          <p:cNvPr id="28" name="Personal/Anlagen"/>
+          <p:cNvPr id="26" name="Personal/Anlagen"/>
           <p:cNvSpPr/>
           <p:nvPr/>
         </p:nvSpPr>
@@ -4418,7 +4360,7 @@
       </p:sp>
       <p:sp>
         <p:nvSpPr>
-          <p:cNvPr id="29" name="Personal/Anlagen–Kapazität"/>
+          <p:cNvPr id="27" name="Personal/Anlagen–Kapazität"/>
           <p:cNvSpPr/>
           <p:nvPr/>
         </p:nvSpPr>
@@ -4463,36 +4405,7 @@
       </p:sp>
       <p:sp>
         <p:nvSpPr>
-          <p:cNvPr id="30" name="Knoten"/>
-          <p:cNvSpPr/>
-          <p:nvPr/>
-        </p:nvSpPr>
-        <p:spPr>
-          <a:xfrm>
-            <a:off x="2890800" y="1179000"/>
-            <a:ext cx="32400" cy="32400"/>
-          </a:xfrm>
-          <a:prstGeom prst="ellipse">
-            <a:avLst/>
-          </a:prstGeom>
-          <a:solidFill>
-            <a:srgbClr val="3A3F44"/>
-          </a:solidFill>
-          <a:ln>
-            <a:noFill/>
-          </a:ln>
-        </p:spPr>
-        <p:txBody>
-          <a:bodyPr rtlCol="0" anchor="ctr"/>
-          <a:lstStyle/>
-          <a:p>
-            <a:pPr algn="ctr"/>
-          </a:p>
-        </p:txBody>
-      </p:sp>
-      <p:sp>
-        <p:nvSpPr>
-          <p:cNvPr id="31" name="Kapazität–Kostenstellen"/>
+          <p:cNvPr id="28" name="Kapazität–Kostenstellen"/>
           <p:cNvSpPr/>
           <p:nvPr/>
         </p:nvSpPr>
@@ -4537,7 +4450,7 @@
       </p:sp>
       <p:sp>
         <p:nvSpPr>
-          <p:cNvPr id="32" name="Kostenstellen–Herstellkosten"/>
+          <p:cNvPr id="29" name="Kostenstellen–Herstellkosten"/>
           <p:cNvSpPr/>
           <p:nvPr/>
         </p:nvSpPr>
@@ -4582,7 +4495,7 @@
       </p:sp>
       <p:sp>
         <p:nvSpPr>
-          <p:cNvPr id="33" name="Herstellkosten/Kostenstellen"/>
+          <p:cNvPr id="30" name="Herstellkosten/Kostenstellen"/>
           <p:cNvSpPr/>
           <p:nvPr/>
         </p:nvSpPr>
@@ -4632,7 +4545,7 @@
       </p:sp>
       <p:sp>
         <p:nvSpPr>
-          <p:cNvPr id="34" name="Herstellkosten/Kostenstellen–Produktergebnis"/>
+          <p:cNvPr id="31" name="Herstellkosten/Kostenstellen–Produktergebnis"/>
           <p:cNvSpPr/>
           <p:nvPr/>
         </p:nvSpPr>
@@ -4677,36 +4590,7 @@
       </p:sp>
       <p:sp>
         <p:nvSpPr>
-          <p:cNvPr id="35" name="Knoten"/>
-          <p:cNvSpPr/>
-          <p:nvPr/>
-        </p:nvSpPr>
-        <p:spPr>
-          <a:xfrm>
-            <a:off x="2209050" y="1935000"/>
-            <a:ext cx="32400" cy="32400"/>
-          </a:xfrm>
-          <a:prstGeom prst="ellipse">
-            <a:avLst/>
-          </a:prstGeom>
-          <a:solidFill>
-            <a:srgbClr val="3A3F44"/>
-          </a:solidFill>
-          <a:ln>
-            <a:noFill/>
-          </a:ln>
-        </p:spPr>
-        <p:txBody>
-          <a:bodyPr rtlCol="0" anchor="ctr"/>
-          <a:lstStyle/>
-          <a:p>
-            <a:pPr algn="ctr"/>
-          </a:p>
-        </p:txBody>
-      </p:sp>
-      <p:sp>
-        <p:nvSpPr>
-          <p:cNvPr id="36" name="Umsatz–Produktergebnis"/>
+          <p:cNvPr id="32" name="Umsatz–Produktergebnis"/>
           <p:cNvSpPr/>
           <p:nvPr/>
         </p:nvSpPr>
@@ -4751,7 +4635,7 @@
       </p:sp>
       <p:sp>
         <p:nvSpPr>
-          <p:cNvPr id="37" name="Produktergebnis Bus"/>
+          <p:cNvPr id="33" name="Produktergebnis Bus"/>
           <p:cNvSpPr/>
           <p:nvPr/>
         </p:nvSpPr>
@@ -4796,7 +4680,7 @@
       </p:sp>
       <p:sp>
         <p:nvSpPr>
-          <p:cNvPr id="38" name="Produktergebnis–30"/>
+          <p:cNvPr id="34" name="Produktergebnis–30"/>
           <p:cNvSpPr/>
           <p:nvPr/>
         </p:nvSpPr>
@@ -4844,7 +4728,7 @@
       </p:sp>
       <p:sp>
         <p:nvSpPr>
-          <p:cNvPr id="39" name="Produktergebnis–81"/>
+          <p:cNvPr id="35" name="Produktergebnis–81"/>
           <p:cNvSpPr/>
           <p:nvPr/>
         </p:nvSpPr>
@@ -4892,36 +4776,7 @@
       </p:sp>
       <p:sp>
         <p:nvSpPr>
-          <p:cNvPr id="40" name="Knoten"/>
-          <p:cNvSpPr/>
-          <p:nvPr/>
-        </p:nvSpPr>
-        <p:spPr>
-          <a:xfrm>
-            <a:off x="1981800" y="2331000"/>
-            <a:ext cx="32400" cy="32400"/>
-          </a:xfrm>
-          <a:prstGeom prst="ellipse">
-            <a:avLst/>
-          </a:prstGeom>
-          <a:solidFill>
-            <a:srgbClr val="3A3F44"/>
-          </a:solidFill>
-          <a:ln>
-            <a:noFill/>
-          </a:ln>
-        </p:spPr>
-        <p:txBody>
-          <a:bodyPr rtlCol="0" anchor="ctr"/>
-          <a:lstStyle/>
-          <a:p>
-            <a:pPr algn="ctr"/>
-          </a:p>
-        </p:txBody>
-      </p:sp>
-      <p:sp>
-        <p:nvSpPr>
-          <p:cNvPr id="41" name="Bus Investition"/>
+          <p:cNvPr id="36" name="Bus Investition"/>
           <p:cNvSpPr/>
           <p:nvPr/>
         </p:nvSpPr>
@@ -4965,7 +4820,7 @@
       </p:sp>
       <p:sp>
         <p:nvSpPr>
-          <p:cNvPr id="42" name="Bus–15"/>
+          <p:cNvPr id="37" name="Bus–15"/>
           <p:cNvSpPr/>
           <p:nvPr/>
         </p:nvSpPr>
@@ -5010,7 +4865,7 @@
       </p:sp>
       <p:sp>
         <p:nvSpPr>
-          <p:cNvPr id="43" name="Bus–39"/>
+          <p:cNvPr id="38" name="Bus–39"/>
           <p:cNvSpPr/>
           <p:nvPr/>
         </p:nvSpPr>
@@ -5055,7 +4910,7 @@
       </p:sp>
       <p:sp>
         <p:nvSpPr>
-          <p:cNvPr id="44" name="Bus–71"/>
+          <p:cNvPr id="39" name="Bus–71"/>
           <p:cNvSpPr/>
           <p:nvPr/>
         </p:nvSpPr>
@@ -5100,36 +4955,7 @@
       </p:sp>
       <p:sp>
         <p:nvSpPr>
-          <p:cNvPr id="45" name="Knoten"/>
-          <p:cNvSpPr/>
-          <p:nvPr/>
-        </p:nvSpPr>
-        <p:spPr>
-          <a:xfrm>
-            <a:off x="3857400" y="1377000"/>
-            <a:ext cx="32400" cy="32400"/>
-          </a:xfrm>
-          <a:prstGeom prst="ellipse">
-            <a:avLst/>
-          </a:prstGeom>
-          <a:solidFill>
-            <a:srgbClr val="3A3F44"/>
-          </a:solidFill>
-          <a:ln>
-            <a:noFill/>
-          </a:ln>
-        </p:spPr>
-        <p:txBody>
-          <a:bodyPr rtlCol="0" anchor="ctr"/>
-          <a:lstStyle/>
-          <a:p>
-            <a:pPr algn="ctr"/>
-          </a:p>
-        </p:txBody>
-      </p:sp>
-      <p:sp>
-        <p:nvSpPr>
-          <p:cNvPr id="46" name="Zuflüsse von außen"/>
+          <p:cNvPr id="40" name="Zuflüsse von außen"/>
           <p:cNvSpPr/>
           <p:nvPr/>
         </p:nvSpPr>
@@ -5177,7 +5003,7 @@
       </p:sp>
       <p:sp>
         <p:nvSpPr>
-          <p:cNvPr id="47" name="Zufluss 3"/>
+          <p:cNvPr id="41" name="Zufluss 3"/>
           <p:cNvSpPr/>
           <p:nvPr/>
         </p:nvSpPr>
@@ -5223,7 +5049,7 @@
       </p:sp>
       <p:sp>
         <p:nvSpPr>
-          <p:cNvPr id="48" name="Zufluss 60"/>
+          <p:cNvPr id="42" name="Zufluss 60"/>
           <p:cNvSpPr/>
           <p:nvPr/>
         </p:nvSpPr>
@@ -5269,7 +5095,7 @@
       </p:sp>
       <p:sp>
         <p:nvSpPr>
-          <p:cNvPr id="49" name="Zufluss unten 30"/>
+          <p:cNvPr id="43" name="Zufluss unten 30"/>
           <p:cNvSpPr/>
           <p:nvPr/>
         </p:nvSpPr>
@@ -5315,7 +5141,7 @@
       </p:sp>
       <p:sp>
         <p:nvSpPr>
-          <p:cNvPr id="50" name="Zufluss unten 81"/>
+          <p:cNvPr id="44" name="Zufluss unten 81"/>
           <p:cNvSpPr/>
           <p:nvPr/>
         </p:nvSpPr>
@@ -5349,64 +5175,6 @@
             <a:prstDash val="sysDash"/>
             <a:round/>
             <a:tailEnd type="triangle" w="med" len="med"/>
-          </a:ln>
-        </p:spPr>
-        <p:txBody>
-          <a:bodyPr rtlCol="0" anchor="ctr"/>
-          <a:lstStyle/>
-          <a:p>
-            <a:pPr algn="ctr"/>
-          </a:p>
-        </p:txBody>
-      </p:sp>
-      <p:sp>
-        <p:nvSpPr>
-          <p:cNvPr id="51" name="Knoten"/>
-          <p:cNvSpPr/>
-          <p:nvPr/>
-        </p:nvSpPr>
-        <p:spPr>
-          <a:xfrm>
-            <a:off x="70200" y="2133000"/>
-            <a:ext cx="32400" cy="32400"/>
-          </a:xfrm>
-          <a:prstGeom prst="ellipse">
-            <a:avLst/>
-          </a:prstGeom>
-          <a:solidFill>
-            <a:srgbClr val="3A3F44"/>
-          </a:solidFill>
-          <a:ln>
-            <a:noFill/>
-          </a:ln>
-        </p:spPr>
-        <p:txBody>
-          <a:bodyPr rtlCol="0" anchor="ctr"/>
-          <a:lstStyle/>
-          <a:p>
-            <a:pPr algn="ctr"/>
-          </a:p>
-        </p:txBody>
-      </p:sp>
-      <p:sp>
-        <p:nvSpPr>
-          <p:cNvPr id="52" name="Knoten"/>
-          <p:cNvSpPr/>
-          <p:nvPr/>
-        </p:nvSpPr>
-        <p:spPr>
-          <a:xfrm>
-            <a:off x="1072800" y="2759400"/>
-            <a:ext cx="32400" cy="32400"/>
-          </a:xfrm>
-          <a:prstGeom prst="ellipse">
-            <a:avLst/>
-          </a:prstGeom>
-          <a:solidFill>
-            <a:srgbClr val="3A3F44"/>
-          </a:solidFill>
-          <a:ln>
-            <a:noFill/>
           </a:ln>
         </p:spPr>
         <p:txBody>
